--- a/ai-case-library/research/ventures/grid-idea-robots.pptx
+++ b/ai-case-library/research/ventures/grid-idea-robots.pptx
@@ -2554,7 +2554,7 @@
       </p:sp>
       <p:pic>
         <p:nvPicPr>
-          <p:cNvPr id="7" name="Image 0" descr="/tmp/claude-0/-home-user/5ac64fc3-708b-5ba2-8575-a96a48f05f03/scratchpad/product/robots.png">    </p:cNvPr>
+          <p:cNvPr id="7" name="Image 0" descr="_product/robots.png">    </p:cNvPr>
           <p:cNvPicPr>
             <a:picLocks noChangeAspect="1"/>
           </p:cNvPicPr>
@@ -5998,7 +5998,7 @@
                 <a:ea typeface="Arial" pitchFamily="34" charset="-122"/>
                 <a:cs typeface="Arial" pitchFamily="34" charset="-120"/>
               </a:rPr>
-              <a:t>Этап 2 (следующий раунд, ориентир 20–30 млн $): инженерные фирмы с роботами и ИИ внутри — партнёрство или покупка. За инженерные фирмы стратеги платят по 445 тыс. $ за инженера (WSP → POWER); фирма без людей в поле стоит дороже.</a:t>
+              <a:t>Этап 2 (следующий раунд, ориентир 20–30 млн $): инженерные фирмы с роботами и ИИ внутри — партнёрство или покупка. Малые фирмы стоят 5–7 годовых прибылей; 445 тыс. $ за инженера (WSP → POWER) платят за масштаб, не за ИИ. Что фирма с роботами в поле стоит дороже — допущение.</a:t>
             </a:r>
             <a:endParaRPr lang="en-US" sz="1300" dirty="0"/>
           </a:p>
@@ -6391,7 +6391,7 @@
                 <a:ea typeface="Arial" pitchFamily="34" charset="-122"/>
                 <a:cs typeface="Arial" pitchFamily="34" charset="-120"/>
               </a:rPr>
-              <a:t>1,78 млрд $ / 4000 сотрудников — WSP → POWER Engineers, 10.2024; 445 тыс. $ за инженера = 1,78 млрд / 4000. Спрос дата-центров 415 → 950 ТВт·ч — IEA. Black &amp; Veatch — вакансия 27.08.2026.</a:t>
+              <a:t>1,78 млрд $ / 4000 сотрудников — WSP → POWER Engineers, 10.2024; 445 тыс. $ за инженера = 1,78 млрд / 4000 (группа на 4000 человек); малые фирмы 5,4–7,5× EBITDA — ROG Partners, см. engineering-rollup-passport.md. Спрос дата-центров 415 → 950 ТВт·ч — IEA. Black &amp; Veatch — вакансия 27.08.2026.</a:t>
             </a:r>
             <a:endParaRPr lang="en-US" sz="1150" dirty="0"/>
           </a:p>
